--- a/CNN/CNN.pptx
+++ b/CNN/CNN.pptx
@@ -5,18 +5,21 @@
     <p:sldMasterId id="2147483660" r:id="rId1"/>
   </p:sldMasterIdLst>
   <p:notesMasterIdLst>
-    <p:notesMasterId r:id="rId8"/>
+    <p:notesMasterId r:id="rId11"/>
   </p:notesMasterIdLst>
   <p:handoutMasterIdLst>
-    <p:handoutMasterId r:id="rId9"/>
+    <p:handoutMasterId r:id="rId12"/>
   </p:handoutMasterIdLst>
   <p:sldIdLst>
     <p:sldId id="256" r:id="rId2"/>
     <p:sldId id="1094" r:id="rId3"/>
     <p:sldId id="978" r:id="rId4"/>
-    <p:sldId id="1095" r:id="rId5"/>
-    <p:sldId id="1096" r:id="rId6"/>
-    <p:sldId id="1097" r:id="rId7"/>
+    <p:sldId id="1098" r:id="rId5"/>
+    <p:sldId id="1099" r:id="rId6"/>
+    <p:sldId id="1100" r:id="rId7"/>
+    <p:sldId id="1095" r:id="rId8"/>
+    <p:sldId id="1096" r:id="rId9"/>
+    <p:sldId id="1097" r:id="rId10"/>
   </p:sldIdLst>
   <p:sldSz cx="12192000" cy="6858000"/>
   <p:notesSz cx="6858000" cy="9144000"/>
@@ -127,6 +130,9 @@
           <p14:sldIdLst>
             <p14:sldId id="1094"/>
             <p14:sldId id="978"/>
+            <p14:sldId id="1098"/>
+            <p14:sldId id="1099"/>
+            <p14:sldId id="1100"/>
             <p14:sldId id="1095"/>
             <p14:sldId id="1096"/>
             <p14:sldId id="1097"/>
@@ -254,7 +260,7 @@
                 <a:latin typeface="맑은 고딕" panose="020B0503020000020004" pitchFamily="50" charset="-127"/>
                 <a:ea typeface="맑은 고딕" panose="020B0503020000020004" pitchFamily="50" charset="-127"/>
               </a:rPr>
-              <a:t>2026-06-06</a:t>
+              <a:t>2026-06-08</a:t>
             </a:fld>
             <a:endParaRPr lang="ko-KR" altLang="en-US">
               <a:latin typeface="맑은 고딕" panose="020B0503020000020004" pitchFamily="50" charset="-127"/>
@@ -440,7 +446,7 @@
           <a:p>
             <a:fld id="{43E1C3DD-4A19-441D-907C-380838DB51C4}" type="datetime1">
               <a:rPr lang="ko-KR" altLang="en-US" noProof="0" smtClean="0"/>
-              <a:t>2026-06-06</a:t>
+              <a:t>2026-06-08</a:t>
             </a:fld>
             <a:endParaRPr lang="ko-KR" altLang="en-US" noProof="0"/>
           </a:p>
@@ -1406,7 +1412,7 @@
           <a:p>
             <a:fld id="{990475B5-67CA-4281-BDCA-DA943C3C8EB3}" type="datetime1">
               <a:rPr lang="ko-KR" altLang="en-US" noProof="0" smtClean="0"/>
-              <a:t>2026-06-06</a:t>
+              <a:t>2026-06-08</a:t>
             </a:fld>
             <a:endParaRPr lang="ko-KR" altLang="en-US" noProof="0"/>
           </a:p>
@@ -2060,7 +2066,7 @@
           <a:p>
             <a:fld id="{48A87A34-81AB-432B-8DAE-1953F412C126}" type="datetimeFigureOut">
               <a:rPr lang="en-US" smtClean="0"/>
-              <a:t>6/6/2026</a:t>
+              <a:t>6/8/2026</a:t>
             </a:fld>
             <a:endParaRPr lang="en-US" dirty="0"/>
           </a:p>
@@ -2356,7 +2362,7 @@
           <a:p>
             <a:fld id="{C655C81E-72E7-4D05-94B5-F45B321A525D}" type="datetime1">
               <a:rPr lang="ko-KR" altLang="en-US" noProof="0" smtClean="0"/>
-              <a:t>2026-06-06</a:t>
+              <a:t>2026-06-08</a:t>
             </a:fld>
             <a:endParaRPr lang="ko-KR" altLang="en-US" noProof="0" dirty="0">
               <a:latin typeface="맑은 고딕" panose="020B0503020000020004" pitchFamily="50" charset="-127"/>
@@ -3656,6 +3662,1960 @@
         <p:cNvPr id="1" name="">
           <a:extLst>
             <a:ext uri="{FF2B5EF4-FFF2-40B4-BE49-F238E27FC236}">
+              <a16:creationId xmlns:a16="http://schemas.microsoft.com/office/drawing/2014/main" id="{C2C3436E-AD26-A468-3DD1-936CDE57F3BE}"/>
+            </a:ext>
+          </a:extLst>
+        </p:cNvPr>
+        <p:cNvGrpSpPr/>
+        <p:nvPr/>
+      </p:nvGrpSpPr>
+      <p:grpSpPr>
+        <a:xfrm>
+          <a:off x="0" y="0"/>
+          <a:ext cx="0" cy="0"/>
+          <a:chOff x="0" y="0"/>
+          <a:chExt cx="0" cy="0"/>
+        </a:xfrm>
+      </p:grpSpPr>
+      <p:sp>
+        <p:nvSpPr>
+          <p:cNvPr id="4" name="슬라이드 번호 개체 틀 3">
+            <a:extLst>
+              <a:ext uri="{FF2B5EF4-FFF2-40B4-BE49-F238E27FC236}">
+                <a16:creationId xmlns:a16="http://schemas.microsoft.com/office/drawing/2014/main" id="{A2763A47-EBF4-66BE-6CA3-D462E5AD722A}"/>
+              </a:ext>
+            </a:extLst>
+          </p:cNvPr>
+          <p:cNvSpPr>
+            <a:spLocks noGrp="1"/>
+          </p:cNvSpPr>
+          <p:nvPr>
+            <p:ph type="sldNum" sz="quarter" idx="12"/>
+          </p:nvPr>
+        </p:nvSpPr>
+        <p:spPr>
+          <a:xfrm>
+            <a:off x="10514011" y="6036261"/>
+            <a:ext cx="753545" cy="365125"/>
+          </a:xfrm>
+        </p:spPr>
+        <p:txBody>
+          <a:bodyPr/>
+          <a:lstStyle/>
+          <a:p>
+            <a:fld id="{D57F1E4F-1CFF-5643-939E-217C01CDF565}" type="slidenum">
+              <a:rPr lang="en-US" smtClean="0"/>
+              <a:pPr/>
+              <a:t>4</a:t>
+            </a:fld>
+            <a:endParaRPr lang="en-US" dirty="0"/>
+          </a:p>
+        </p:txBody>
+      </p:sp>
+      <p:sp>
+        <p:nvSpPr>
+          <p:cNvPr id="3" name="제목 1">
+            <a:extLst>
+              <a:ext uri="{FF2B5EF4-FFF2-40B4-BE49-F238E27FC236}">
+                <a16:creationId xmlns:a16="http://schemas.microsoft.com/office/drawing/2014/main" id="{D24BF91A-2317-B6DF-AF0D-C3CF326A6F6F}"/>
+              </a:ext>
+            </a:extLst>
+          </p:cNvPr>
+          <p:cNvSpPr txBox="1">
+            <a:spLocks/>
+          </p:cNvSpPr>
+          <p:nvPr/>
+        </p:nvSpPr>
+        <p:spPr>
+          <a:xfrm>
+            <a:off x="475645" y="481983"/>
+            <a:ext cx="10353762" cy="766439"/>
+          </a:xfrm>
+          <a:prstGeom prst="rect">
+            <a:avLst/>
+          </a:prstGeom>
+        </p:spPr>
+        <p:txBody>
+          <a:bodyPr vert="horz" lIns="91440" tIns="45720" rIns="91440" bIns="45720" rtlCol="0" anchor="ctr">
+            <a:normAutofit/>
+          </a:bodyPr>
+          <a:lstStyle>
+            <a:lvl1pPr algn="ctr" defTabSz="914400" rtl="0" eaLnBrk="1" latinLnBrk="1" hangingPunct="1">
+              <a:lnSpc>
+                <a:spcPct val="90000"/>
+              </a:lnSpc>
+              <a:spcBef>
+                <a:spcPct val="0"/>
+              </a:spcBef>
+              <a:buNone/>
+              <a:defRPr sz="3200" kern="1200" cap="all" baseline="0">
+                <a:solidFill>
+                  <a:schemeClr val="tx1"/>
+                </a:solidFill>
+                <a:effectLst/>
+                <a:latin typeface="Batang" panose="02030600000101010101" pitchFamily="18" charset="-127"/>
+                <a:ea typeface="Batang" panose="02030600000101010101" pitchFamily="18" charset="-127"/>
+                <a:cs typeface="+mj-cs"/>
+              </a:defRPr>
+            </a:lvl1pPr>
+          </a:lstStyle>
+          <a:p>
+            <a:pPr algn="l"/>
+            <a:r>
+              <a:rPr lang="en-US" altLang="ko-KR" sz="2800" cap="none" dirty="0" err="1">
+                <a:solidFill>
+                  <a:schemeClr val="bg2">
+                    <a:lumMod val="25000"/>
+                  </a:schemeClr>
+                </a:solidFill>
+                <a:latin typeface="맑은 고딕" panose="020B0503020000020004" pitchFamily="50" charset="-127"/>
+                <a:ea typeface="맑은 고딕" panose="020B0503020000020004" pitchFamily="50" charset="-127"/>
+                <a:cs typeface="Segoe UI Light" panose="020B0502040204020203" pitchFamily="34" charset="0"/>
+              </a:rPr>
+              <a:t>PyTorch</a:t>
+            </a:r>
+            <a:endParaRPr lang="ko-KR" altLang="en-US" sz="2800" cap="none" dirty="0">
+              <a:solidFill>
+                <a:schemeClr val="bg2">
+                  <a:lumMod val="25000"/>
+                </a:schemeClr>
+              </a:solidFill>
+              <a:latin typeface="맑은 고딕" panose="020B0503020000020004" pitchFamily="50" charset="-127"/>
+              <a:ea typeface="맑은 고딕" panose="020B0503020000020004" pitchFamily="50" charset="-127"/>
+              <a:cs typeface="Segoe UI Light" panose="020B0502040204020203" pitchFamily="34" charset="0"/>
+            </a:endParaRPr>
+          </a:p>
+        </p:txBody>
+      </p:sp>
+      <p:pic>
+        <p:nvPicPr>
+          <p:cNvPr id="5" name="그림 4">
+            <a:extLst>
+              <a:ext uri="{FF2B5EF4-FFF2-40B4-BE49-F238E27FC236}">
+                <a16:creationId xmlns:a16="http://schemas.microsoft.com/office/drawing/2014/main" id="{03CDD7F5-5E7E-A439-0189-2DE625BE9D6E}"/>
+              </a:ext>
+            </a:extLst>
+          </p:cNvPr>
+          <p:cNvPicPr>
+            <a:picLocks noChangeAspect="1"/>
+          </p:cNvPicPr>
+          <p:nvPr/>
+        </p:nvPicPr>
+        <p:blipFill>
+          <a:blip r:embed="rId2"/>
+          <a:stretch>
+            <a:fillRect/>
+          </a:stretch>
+        </p:blipFill>
+        <p:spPr>
+          <a:xfrm>
+            <a:off x="1533015" y="1717450"/>
+            <a:ext cx="7982459" cy="2558726"/>
+          </a:xfrm>
+          <a:prstGeom prst="rect">
+            <a:avLst/>
+          </a:prstGeom>
+        </p:spPr>
+      </p:pic>
+      <p:pic>
+        <p:nvPicPr>
+          <p:cNvPr id="10" name="그림 9">
+            <a:extLst>
+              <a:ext uri="{FF2B5EF4-FFF2-40B4-BE49-F238E27FC236}">
+                <a16:creationId xmlns:a16="http://schemas.microsoft.com/office/drawing/2014/main" id="{7E8C7DD6-2189-B79E-911A-96DA77508C91}"/>
+              </a:ext>
+            </a:extLst>
+          </p:cNvPr>
+          <p:cNvPicPr>
+            <a:picLocks noChangeAspect="1"/>
+          </p:cNvPicPr>
+          <p:nvPr/>
+        </p:nvPicPr>
+        <p:blipFill>
+          <a:blip r:embed="rId3"/>
+          <a:stretch>
+            <a:fillRect/>
+          </a:stretch>
+        </p:blipFill>
+        <p:spPr>
+          <a:xfrm>
+            <a:off x="1555876" y="4228551"/>
+            <a:ext cx="7936735" cy="1912466"/>
+          </a:xfrm>
+          <a:prstGeom prst="rect">
+            <a:avLst/>
+          </a:prstGeom>
+        </p:spPr>
+      </p:pic>
+    </p:spTree>
+    <p:extLst>
+      <p:ext uri="{BB962C8B-B14F-4D97-AF65-F5344CB8AC3E}">
+        <p14:creationId xmlns:p14="http://schemas.microsoft.com/office/powerpoint/2010/main" val="3548148261"/>
+      </p:ext>
+    </p:extLst>
+  </p:cSld>
+  <p:clrMapOvr>
+    <a:masterClrMapping/>
+  </p:clrMapOvr>
+</p:sld>
+</file>
+
+<file path=ppt/slides/slide5.xml><?xml version="1.0" encoding="utf-8"?>
+<p:sld xmlns:a="http://schemas.openxmlformats.org/drawingml/2006/main" xmlns:r="http://schemas.openxmlformats.org/officeDocument/2006/relationships" xmlns:p="http://schemas.openxmlformats.org/presentationml/2006/main">
+  <p:cSld>
+    <p:spTree>
+      <p:nvGrpSpPr>
+        <p:cNvPr id="1" name="">
+          <a:extLst>
+            <a:ext uri="{FF2B5EF4-FFF2-40B4-BE49-F238E27FC236}">
+              <a16:creationId xmlns:a16="http://schemas.microsoft.com/office/drawing/2014/main" id="{4F076FEF-78EE-44A5-2AA8-B58C4EE7BBC1}"/>
+            </a:ext>
+          </a:extLst>
+        </p:cNvPr>
+        <p:cNvGrpSpPr/>
+        <p:nvPr/>
+      </p:nvGrpSpPr>
+      <p:grpSpPr>
+        <a:xfrm>
+          <a:off x="0" y="0"/>
+          <a:ext cx="0" cy="0"/>
+          <a:chOff x="0" y="0"/>
+          <a:chExt cx="0" cy="0"/>
+        </a:xfrm>
+      </p:grpSpPr>
+      <p:sp>
+        <p:nvSpPr>
+          <p:cNvPr id="4" name="슬라이드 번호 개체 틀 3">
+            <a:extLst>
+              <a:ext uri="{FF2B5EF4-FFF2-40B4-BE49-F238E27FC236}">
+                <a16:creationId xmlns:a16="http://schemas.microsoft.com/office/drawing/2014/main" id="{B686F614-D7E5-C32C-DBA3-8B4425D0E581}"/>
+              </a:ext>
+            </a:extLst>
+          </p:cNvPr>
+          <p:cNvSpPr>
+            <a:spLocks noGrp="1"/>
+          </p:cNvSpPr>
+          <p:nvPr>
+            <p:ph type="sldNum" sz="quarter" idx="12"/>
+          </p:nvPr>
+        </p:nvSpPr>
+        <p:spPr>
+          <a:xfrm>
+            <a:off x="10514011" y="6036261"/>
+            <a:ext cx="753545" cy="365125"/>
+          </a:xfrm>
+        </p:spPr>
+        <p:txBody>
+          <a:bodyPr/>
+          <a:lstStyle/>
+          <a:p>
+            <a:fld id="{D57F1E4F-1CFF-5643-939E-217C01CDF565}" type="slidenum">
+              <a:rPr lang="en-US" smtClean="0"/>
+              <a:pPr/>
+              <a:t>5</a:t>
+            </a:fld>
+            <a:endParaRPr lang="en-US" dirty="0"/>
+          </a:p>
+        </p:txBody>
+      </p:sp>
+      <p:sp>
+        <p:nvSpPr>
+          <p:cNvPr id="3" name="제목 1">
+            <a:extLst>
+              <a:ext uri="{FF2B5EF4-FFF2-40B4-BE49-F238E27FC236}">
+                <a16:creationId xmlns:a16="http://schemas.microsoft.com/office/drawing/2014/main" id="{FDEBB8C4-EB3A-7146-BD71-9E5A3DCDAE21}"/>
+              </a:ext>
+            </a:extLst>
+          </p:cNvPr>
+          <p:cNvSpPr txBox="1">
+            <a:spLocks/>
+          </p:cNvSpPr>
+          <p:nvPr/>
+        </p:nvSpPr>
+        <p:spPr>
+          <a:xfrm>
+            <a:off x="475645" y="481983"/>
+            <a:ext cx="10353762" cy="766439"/>
+          </a:xfrm>
+          <a:prstGeom prst="rect">
+            <a:avLst/>
+          </a:prstGeom>
+        </p:spPr>
+        <p:txBody>
+          <a:bodyPr vert="horz" lIns="91440" tIns="45720" rIns="91440" bIns="45720" rtlCol="0" anchor="ctr">
+            <a:normAutofit/>
+          </a:bodyPr>
+          <a:lstStyle>
+            <a:lvl1pPr algn="ctr" defTabSz="914400" rtl="0" eaLnBrk="1" latinLnBrk="1" hangingPunct="1">
+              <a:lnSpc>
+                <a:spcPct val="90000"/>
+              </a:lnSpc>
+              <a:spcBef>
+                <a:spcPct val="0"/>
+              </a:spcBef>
+              <a:buNone/>
+              <a:defRPr sz="3200" kern="1200" cap="all" baseline="0">
+                <a:solidFill>
+                  <a:schemeClr val="tx1"/>
+                </a:solidFill>
+                <a:effectLst/>
+                <a:latin typeface="Batang" panose="02030600000101010101" pitchFamily="18" charset="-127"/>
+                <a:ea typeface="Batang" panose="02030600000101010101" pitchFamily="18" charset="-127"/>
+                <a:cs typeface="+mj-cs"/>
+              </a:defRPr>
+            </a:lvl1pPr>
+          </a:lstStyle>
+          <a:p>
+            <a:pPr algn="l"/>
+            <a:r>
+              <a:rPr lang="en-US" altLang="ko-KR" sz="2800" cap="none" dirty="0" err="1">
+                <a:solidFill>
+                  <a:schemeClr val="bg2">
+                    <a:lumMod val="25000"/>
+                  </a:schemeClr>
+                </a:solidFill>
+                <a:latin typeface="맑은 고딕" panose="020B0503020000020004" pitchFamily="50" charset="-127"/>
+                <a:ea typeface="맑은 고딕" panose="020B0503020000020004" pitchFamily="50" charset="-127"/>
+                <a:cs typeface="Segoe UI Light" panose="020B0502040204020203" pitchFamily="34" charset="0"/>
+              </a:rPr>
+              <a:t>PyTorch</a:t>
+            </a:r>
+            <a:endParaRPr lang="ko-KR" altLang="en-US" sz="2800" cap="none" dirty="0">
+              <a:solidFill>
+                <a:schemeClr val="bg2">
+                  <a:lumMod val="25000"/>
+                </a:schemeClr>
+              </a:solidFill>
+              <a:latin typeface="맑은 고딕" panose="020B0503020000020004" pitchFamily="50" charset="-127"/>
+              <a:ea typeface="맑은 고딕" panose="020B0503020000020004" pitchFamily="50" charset="-127"/>
+              <a:cs typeface="Segoe UI Light" panose="020B0502040204020203" pitchFamily="34" charset="0"/>
+            </a:endParaRPr>
+          </a:p>
+        </p:txBody>
+      </p:sp>
+      <p:pic>
+        <p:nvPicPr>
+          <p:cNvPr id="7" name="그림 6">
+            <a:extLst>
+              <a:ext uri="{FF2B5EF4-FFF2-40B4-BE49-F238E27FC236}">
+                <a16:creationId xmlns:a16="http://schemas.microsoft.com/office/drawing/2014/main" id="{7B493024-8CAB-4316-C57C-3E230677EA98}"/>
+              </a:ext>
+            </a:extLst>
+          </p:cNvPr>
+          <p:cNvPicPr>
+            <a:picLocks noChangeAspect="1"/>
+          </p:cNvPicPr>
+          <p:nvPr/>
+        </p:nvPicPr>
+        <p:blipFill>
+          <a:blip r:embed="rId2"/>
+          <a:stretch>
+            <a:fillRect/>
+          </a:stretch>
+        </p:blipFill>
+        <p:spPr>
+          <a:xfrm>
+            <a:off x="849546" y="2428767"/>
+            <a:ext cx="2598503" cy="2794423"/>
+          </a:xfrm>
+          <a:prstGeom prst="rect">
+            <a:avLst/>
+          </a:prstGeom>
+        </p:spPr>
+      </p:pic>
+      <p:graphicFrame>
+        <p:nvGraphicFramePr>
+          <p:cNvPr id="8" name="표 7">
+            <a:extLst>
+              <a:ext uri="{FF2B5EF4-FFF2-40B4-BE49-F238E27FC236}">
+                <a16:creationId xmlns:a16="http://schemas.microsoft.com/office/drawing/2014/main" id="{FAC10E04-853C-47EB-871D-F4BE3414E8EA}"/>
+              </a:ext>
+            </a:extLst>
+          </p:cNvPr>
+          <p:cNvGraphicFramePr>
+            <a:graphicFrameLocks noGrp="1"/>
+          </p:cNvGraphicFramePr>
+          <p:nvPr>
+            <p:extLst>
+              <p:ext uri="{D42A27DB-BD31-4B8C-83A1-F6EECF244321}">
+                <p14:modId xmlns:p14="http://schemas.microsoft.com/office/powerpoint/2010/main" val="1021481947"/>
+              </p:ext>
+            </p:extLst>
+          </p:nvPr>
+        </p:nvGraphicFramePr>
+        <p:xfrm>
+          <a:off x="4720662" y="1825844"/>
+          <a:ext cx="1194363" cy="1043895"/>
+        </p:xfrm>
+        <a:graphic>
+          <a:graphicData uri="http://schemas.openxmlformats.org/drawingml/2006/table">
+            <a:tbl>
+              <a:tblPr firstRow="1" bandRow="1">
+                <a:tableStyleId>{5940675A-B579-460E-94D1-54222C63F5DA}</a:tableStyleId>
+              </a:tblPr>
+              <a:tblGrid>
+                <a:gridCol w="398121">
+                  <a:extLst>
+                    <a:ext uri="{9D8B030D-6E8A-4147-A177-3AD203B41FA5}">
+                      <a16:colId xmlns:a16="http://schemas.microsoft.com/office/drawing/2014/main" val="2786435963"/>
+                    </a:ext>
+                  </a:extLst>
+                </a:gridCol>
+                <a:gridCol w="398121">
+                  <a:extLst>
+                    <a:ext uri="{9D8B030D-6E8A-4147-A177-3AD203B41FA5}">
+                      <a16:colId xmlns:a16="http://schemas.microsoft.com/office/drawing/2014/main" val="3827515645"/>
+                    </a:ext>
+                  </a:extLst>
+                </a:gridCol>
+                <a:gridCol w="398121">
+                  <a:extLst>
+                    <a:ext uri="{9D8B030D-6E8A-4147-A177-3AD203B41FA5}">
+                      <a16:colId xmlns:a16="http://schemas.microsoft.com/office/drawing/2014/main" val="2827207180"/>
+                    </a:ext>
+                  </a:extLst>
+                </a:gridCol>
+              </a:tblGrid>
+              <a:tr h="347965">
+                <a:tc>
+                  <a:txBody>
+                    <a:bodyPr/>
+                    <a:lstStyle/>
+                    <a:p>
+                      <a:pPr algn="r" latinLnBrk="1"/>
+                      <a:r>
+                        <a:rPr lang="en-US" altLang="ko-KR" sz="1400" dirty="0">
+                          <a:latin typeface="D2Coding" panose="020B0609020101020101" pitchFamily="49" charset="-127"/>
+                          <a:ea typeface="D2Coding" panose="020B0609020101020101" pitchFamily="49" charset="-127"/>
+                        </a:rPr>
+                        <a:t>1</a:t>
+                      </a:r>
+                      <a:endParaRPr lang="ko-KR" altLang="en-US" sz="1400" dirty="0">
+                        <a:latin typeface="D2Coding" panose="020B0609020101020101" pitchFamily="49" charset="-127"/>
+                        <a:ea typeface="D2Coding" panose="020B0609020101020101" pitchFamily="49" charset="-127"/>
+                      </a:endParaRPr>
+                    </a:p>
+                  </a:txBody>
+                  <a:tcPr/>
+                </a:tc>
+                <a:tc>
+                  <a:txBody>
+                    <a:bodyPr/>
+                    <a:lstStyle/>
+                    <a:p>
+                      <a:pPr algn="r" latinLnBrk="1"/>
+                      <a:r>
+                        <a:rPr lang="en-US" altLang="ko-KR" sz="1400" dirty="0">
+                          <a:latin typeface="D2Coding" panose="020B0609020101020101" pitchFamily="49" charset="-127"/>
+                          <a:ea typeface="D2Coding" panose="020B0609020101020101" pitchFamily="49" charset="-127"/>
+                        </a:rPr>
+                        <a:t>1</a:t>
+                      </a:r>
+                      <a:endParaRPr lang="ko-KR" altLang="en-US" sz="1400" dirty="0">
+                        <a:latin typeface="D2Coding" panose="020B0609020101020101" pitchFamily="49" charset="-127"/>
+                        <a:ea typeface="D2Coding" panose="020B0609020101020101" pitchFamily="49" charset="-127"/>
+                      </a:endParaRPr>
+                    </a:p>
+                  </a:txBody>
+                  <a:tcPr/>
+                </a:tc>
+                <a:tc>
+                  <a:txBody>
+                    <a:bodyPr/>
+                    <a:lstStyle/>
+                    <a:p>
+                      <a:pPr algn="r" latinLnBrk="1"/>
+                      <a:r>
+                        <a:rPr lang="en-US" altLang="ko-KR" sz="1400" dirty="0">
+                          <a:latin typeface="D2Coding" panose="020B0609020101020101" pitchFamily="49" charset="-127"/>
+                          <a:ea typeface="D2Coding" panose="020B0609020101020101" pitchFamily="49" charset="-127"/>
+                        </a:rPr>
+                        <a:t>1</a:t>
+                      </a:r>
+                      <a:endParaRPr lang="ko-KR" altLang="en-US" sz="1400" dirty="0">
+                        <a:latin typeface="D2Coding" panose="020B0609020101020101" pitchFamily="49" charset="-127"/>
+                        <a:ea typeface="D2Coding" panose="020B0609020101020101" pitchFamily="49" charset="-127"/>
+                      </a:endParaRPr>
+                    </a:p>
+                  </a:txBody>
+                  <a:tcPr/>
+                </a:tc>
+                <a:extLst>
+                  <a:ext uri="{0D108BD9-81ED-4DB2-BD59-A6C34878D82A}">
+                    <a16:rowId xmlns:a16="http://schemas.microsoft.com/office/drawing/2014/main" val="1894483622"/>
+                  </a:ext>
+                </a:extLst>
+              </a:tr>
+              <a:tr h="347965">
+                <a:tc>
+                  <a:txBody>
+                    <a:bodyPr/>
+                    <a:lstStyle/>
+                    <a:p>
+                      <a:pPr algn="r" latinLnBrk="1"/>
+                      <a:r>
+                        <a:rPr lang="en-US" altLang="ko-KR" sz="1400" dirty="0">
+                          <a:latin typeface="D2Coding" panose="020B0609020101020101" pitchFamily="49" charset="-127"/>
+                          <a:ea typeface="D2Coding" panose="020B0609020101020101" pitchFamily="49" charset="-127"/>
+                        </a:rPr>
+                        <a:t>1</a:t>
+                      </a:r>
+                      <a:endParaRPr lang="ko-KR" altLang="en-US" sz="1400" dirty="0">
+                        <a:latin typeface="D2Coding" panose="020B0609020101020101" pitchFamily="49" charset="-127"/>
+                        <a:ea typeface="D2Coding" panose="020B0609020101020101" pitchFamily="49" charset="-127"/>
+                      </a:endParaRPr>
+                    </a:p>
+                  </a:txBody>
+                  <a:tcPr/>
+                </a:tc>
+                <a:tc>
+                  <a:txBody>
+                    <a:bodyPr/>
+                    <a:lstStyle/>
+                    <a:p>
+                      <a:pPr algn="r" latinLnBrk="1"/>
+                      <a:r>
+                        <a:rPr lang="en-US" altLang="ko-KR" sz="1400" dirty="0">
+                          <a:latin typeface="D2Coding" panose="020B0609020101020101" pitchFamily="49" charset="-127"/>
+                          <a:ea typeface="D2Coding" panose="020B0609020101020101" pitchFamily="49" charset="-127"/>
+                        </a:rPr>
+                        <a:t>-5</a:t>
+                      </a:r>
+                      <a:endParaRPr lang="ko-KR" altLang="en-US" sz="1400" dirty="0">
+                        <a:latin typeface="D2Coding" panose="020B0609020101020101" pitchFamily="49" charset="-127"/>
+                        <a:ea typeface="D2Coding" panose="020B0609020101020101" pitchFamily="49" charset="-127"/>
+                      </a:endParaRPr>
+                    </a:p>
+                  </a:txBody>
+                  <a:tcPr/>
+                </a:tc>
+                <a:tc>
+                  <a:txBody>
+                    <a:bodyPr/>
+                    <a:lstStyle/>
+                    <a:p>
+                      <a:pPr algn="r" latinLnBrk="1"/>
+                      <a:r>
+                        <a:rPr lang="en-US" altLang="ko-KR" sz="1400" dirty="0">
+                          <a:latin typeface="D2Coding" panose="020B0609020101020101" pitchFamily="49" charset="-127"/>
+                          <a:ea typeface="D2Coding" panose="020B0609020101020101" pitchFamily="49" charset="-127"/>
+                        </a:rPr>
+                        <a:t>-5</a:t>
+                      </a:r>
+                      <a:endParaRPr lang="ko-KR" altLang="en-US" sz="1400" dirty="0">
+                        <a:latin typeface="D2Coding" panose="020B0609020101020101" pitchFamily="49" charset="-127"/>
+                        <a:ea typeface="D2Coding" panose="020B0609020101020101" pitchFamily="49" charset="-127"/>
+                      </a:endParaRPr>
+                    </a:p>
+                  </a:txBody>
+                  <a:tcPr/>
+                </a:tc>
+                <a:extLst>
+                  <a:ext uri="{0D108BD9-81ED-4DB2-BD59-A6C34878D82A}">
+                    <a16:rowId xmlns:a16="http://schemas.microsoft.com/office/drawing/2014/main" val="244328434"/>
+                  </a:ext>
+                </a:extLst>
+              </a:tr>
+              <a:tr h="347965">
+                <a:tc>
+                  <a:txBody>
+                    <a:bodyPr/>
+                    <a:lstStyle/>
+                    <a:p>
+                      <a:pPr algn="r" latinLnBrk="1"/>
+                      <a:r>
+                        <a:rPr lang="en-US" altLang="ko-KR" sz="1400" dirty="0">
+                          <a:latin typeface="D2Coding" panose="020B0609020101020101" pitchFamily="49" charset="-127"/>
+                          <a:ea typeface="D2Coding" panose="020B0609020101020101" pitchFamily="49" charset="-127"/>
+                        </a:rPr>
+                        <a:t>-5</a:t>
+                      </a:r>
+                      <a:endParaRPr lang="ko-KR" altLang="en-US" sz="1400" dirty="0">
+                        <a:latin typeface="D2Coding" panose="020B0609020101020101" pitchFamily="49" charset="-127"/>
+                        <a:ea typeface="D2Coding" panose="020B0609020101020101" pitchFamily="49" charset="-127"/>
+                      </a:endParaRPr>
+                    </a:p>
+                  </a:txBody>
+                  <a:tcPr/>
+                </a:tc>
+                <a:tc>
+                  <a:txBody>
+                    <a:bodyPr/>
+                    <a:lstStyle/>
+                    <a:p>
+                      <a:pPr algn="r" latinLnBrk="1"/>
+                      <a:r>
+                        <a:rPr lang="en-US" altLang="ko-KR" sz="1400" dirty="0">
+                          <a:latin typeface="D2Coding" panose="020B0609020101020101" pitchFamily="49" charset="-127"/>
+                          <a:ea typeface="D2Coding" panose="020B0609020101020101" pitchFamily="49" charset="-127"/>
+                        </a:rPr>
+                        <a:t>-5</a:t>
+                      </a:r>
+                      <a:endParaRPr lang="ko-KR" altLang="en-US" sz="1400" dirty="0">
+                        <a:latin typeface="D2Coding" panose="020B0609020101020101" pitchFamily="49" charset="-127"/>
+                        <a:ea typeface="D2Coding" panose="020B0609020101020101" pitchFamily="49" charset="-127"/>
+                      </a:endParaRPr>
+                    </a:p>
+                  </a:txBody>
+                  <a:tcPr/>
+                </a:tc>
+                <a:tc>
+                  <a:txBody>
+                    <a:bodyPr/>
+                    <a:lstStyle/>
+                    <a:p>
+                      <a:pPr algn="r" latinLnBrk="1"/>
+                      <a:r>
+                        <a:rPr lang="en-US" altLang="ko-KR" sz="1400" dirty="0">
+                          <a:latin typeface="D2Coding" panose="020B0609020101020101" pitchFamily="49" charset="-127"/>
+                          <a:ea typeface="D2Coding" panose="020B0609020101020101" pitchFamily="49" charset="-127"/>
+                        </a:rPr>
+                        <a:t>-5</a:t>
+                      </a:r>
+                      <a:endParaRPr lang="ko-KR" altLang="en-US" sz="1400" dirty="0">
+                        <a:latin typeface="D2Coding" panose="020B0609020101020101" pitchFamily="49" charset="-127"/>
+                        <a:ea typeface="D2Coding" panose="020B0609020101020101" pitchFamily="49" charset="-127"/>
+                      </a:endParaRPr>
+                    </a:p>
+                  </a:txBody>
+                  <a:tcPr/>
+                </a:tc>
+                <a:extLst>
+                  <a:ext uri="{0D108BD9-81ED-4DB2-BD59-A6C34878D82A}">
+                    <a16:rowId xmlns:a16="http://schemas.microsoft.com/office/drawing/2014/main" val="4122078504"/>
+                  </a:ext>
+                </a:extLst>
+              </a:tr>
+            </a:tbl>
+          </a:graphicData>
+        </a:graphic>
+      </p:graphicFrame>
+      <p:graphicFrame>
+        <p:nvGraphicFramePr>
+          <p:cNvPr id="9" name="표 8">
+            <a:extLst>
+              <a:ext uri="{FF2B5EF4-FFF2-40B4-BE49-F238E27FC236}">
+                <a16:creationId xmlns:a16="http://schemas.microsoft.com/office/drawing/2014/main" id="{98739568-9AF2-1CE4-75FB-91FB3C31356C}"/>
+              </a:ext>
+            </a:extLst>
+          </p:cNvPr>
+          <p:cNvGraphicFramePr>
+            <a:graphicFrameLocks noGrp="1"/>
+          </p:cNvGraphicFramePr>
+          <p:nvPr>
+            <p:extLst>
+              <p:ext uri="{D42A27DB-BD31-4B8C-83A1-F6EECF244321}">
+                <p14:modId xmlns:p14="http://schemas.microsoft.com/office/powerpoint/2010/main" val="1523725685"/>
+              </p:ext>
+            </p:extLst>
+          </p:nvPr>
+        </p:nvGraphicFramePr>
+        <p:xfrm>
+          <a:off x="4720662" y="3537693"/>
+          <a:ext cx="1194363" cy="1043895"/>
+        </p:xfrm>
+        <a:graphic>
+          <a:graphicData uri="http://schemas.openxmlformats.org/drawingml/2006/table">
+            <a:tbl>
+              <a:tblPr firstRow="1" bandRow="1">
+                <a:tableStyleId>{5940675A-B579-460E-94D1-54222C63F5DA}</a:tableStyleId>
+              </a:tblPr>
+              <a:tblGrid>
+                <a:gridCol w="398121">
+                  <a:extLst>
+                    <a:ext uri="{9D8B030D-6E8A-4147-A177-3AD203B41FA5}">
+                      <a16:colId xmlns:a16="http://schemas.microsoft.com/office/drawing/2014/main" val="2786435963"/>
+                    </a:ext>
+                  </a:extLst>
+                </a:gridCol>
+                <a:gridCol w="398121">
+                  <a:extLst>
+                    <a:ext uri="{9D8B030D-6E8A-4147-A177-3AD203B41FA5}">
+                      <a16:colId xmlns:a16="http://schemas.microsoft.com/office/drawing/2014/main" val="3827515645"/>
+                    </a:ext>
+                  </a:extLst>
+                </a:gridCol>
+                <a:gridCol w="398121">
+                  <a:extLst>
+                    <a:ext uri="{9D8B030D-6E8A-4147-A177-3AD203B41FA5}">
+                      <a16:colId xmlns:a16="http://schemas.microsoft.com/office/drawing/2014/main" val="2827207180"/>
+                    </a:ext>
+                  </a:extLst>
+                </a:gridCol>
+              </a:tblGrid>
+              <a:tr h="347965">
+                <a:tc>
+                  <a:txBody>
+                    <a:bodyPr/>
+                    <a:lstStyle/>
+                    <a:p>
+                      <a:pPr algn="r" latinLnBrk="1"/>
+                      <a:r>
+                        <a:rPr lang="en-US" altLang="ko-KR" sz="1400" dirty="0">
+                          <a:latin typeface="D2Coding" panose="020B0609020101020101" pitchFamily="49" charset="-127"/>
+                          <a:ea typeface="D2Coding" panose="020B0609020101020101" pitchFamily="49" charset="-127"/>
+                        </a:rPr>
+                        <a:t>1</a:t>
+                      </a:r>
+                      <a:endParaRPr lang="ko-KR" altLang="en-US" sz="1400" dirty="0">
+                        <a:latin typeface="D2Coding" panose="020B0609020101020101" pitchFamily="49" charset="-127"/>
+                        <a:ea typeface="D2Coding" panose="020B0609020101020101" pitchFamily="49" charset="-127"/>
+                      </a:endParaRPr>
+                    </a:p>
+                  </a:txBody>
+                  <a:tcPr/>
+                </a:tc>
+                <a:tc>
+                  <a:txBody>
+                    <a:bodyPr/>
+                    <a:lstStyle/>
+                    <a:p>
+                      <a:pPr algn="r" latinLnBrk="1"/>
+                      <a:r>
+                        <a:rPr lang="en-US" altLang="ko-KR" sz="1400" dirty="0">
+                          <a:latin typeface="D2Coding" panose="020B0609020101020101" pitchFamily="49" charset="-127"/>
+                          <a:ea typeface="D2Coding" panose="020B0609020101020101" pitchFamily="49" charset="-127"/>
+                        </a:rPr>
+                        <a:t>-5</a:t>
+                      </a:r>
+                      <a:endParaRPr lang="ko-KR" altLang="en-US" sz="1400" dirty="0">
+                        <a:latin typeface="D2Coding" panose="020B0609020101020101" pitchFamily="49" charset="-127"/>
+                        <a:ea typeface="D2Coding" panose="020B0609020101020101" pitchFamily="49" charset="-127"/>
+                      </a:endParaRPr>
+                    </a:p>
+                  </a:txBody>
+                  <a:tcPr/>
+                </a:tc>
+                <a:tc>
+                  <a:txBody>
+                    <a:bodyPr/>
+                    <a:lstStyle/>
+                    <a:p>
+                      <a:pPr algn="r" latinLnBrk="1"/>
+                      <a:r>
+                        <a:rPr lang="en-US" altLang="ko-KR" sz="1400" dirty="0">
+                          <a:latin typeface="D2Coding" panose="020B0609020101020101" pitchFamily="49" charset="-127"/>
+                          <a:ea typeface="D2Coding" panose="020B0609020101020101" pitchFamily="49" charset="-127"/>
+                        </a:rPr>
+                        <a:t>-5</a:t>
+                      </a:r>
+                      <a:endParaRPr lang="ko-KR" altLang="en-US" sz="1400" dirty="0">
+                        <a:latin typeface="D2Coding" panose="020B0609020101020101" pitchFamily="49" charset="-127"/>
+                        <a:ea typeface="D2Coding" panose="020B0609020101020101" pitchFamily="49" charset="-127"/>
+                      </a:endParaRPr>
+                    </a:p>
+                  </a:txBody>
+                  <a:tcPr/>
+                </a:tc>
+                <a:extLst>
+                  <a:ext uri="{0D108BD9-81ED-4DB2-BD59-A6C34878D82A}">
+                    <a16:rowId xmlns:a16="http://schemas.microsoft.com/office/drawing/2014/main" val="1894483622"/>
+                  </a:ext>
+                </a:extLst>
+              </a:tr>
+              <a:tr h="347965">
+                <a:tc>
+                  <a:txBody>
+                    <a:bodyPr/>
+                    <a:lstStyle/>
+                    <a:p>
+                      <a:pPr algn="r" latinLnBrk="1"/>
+                      <a:r>
+                        <a:rPr lang="en-US" altLang="ko-KR" sz="1400" dirty="0">
+                          <a:latin typeface="D2Coding" panose="020B0609020101020101" pitchFamily="49" charset="-127"/>
+                          <a:ea typeface="D2Coding" panose="020B0609020101020101" pitchFamily="49" charset="-127"/>
+                        </a:rPr>
+                        <a:t>1</a:t>
+                      </a:r>
+                      <a:endParaRPr lang="ko-KR" altLang="en-US" sz="1400" dirty="0">
+                        <a:latin typeface="D2Coding" panose="020B0609020101020101" pitchFamily="49" charset="-127"/>
+                        <a:ea typeface="D2Coding" panose="020B0609020101020101" pitchFamily="49" charset="-127"/>
+                      </a:endParaRPr>
+                    </a:p>
+                  </a:txBody>
+                  <a:tcPr/>
+                </a:tc>
+                <a:tc>
+                  <a:txBody>
+                    <a:bodyPr/>
+                    <a:lstStyle/>
+                    <a:p>
+                      <a:pPr algn="r" latinLnBrk="1"/>
+                      <a:r>
+                        <a:rPr lang="en-US" altLang="ko-KR" sz="1400" dirty="0">
+                          <a:latin typeface="D2Coding" panose="020B0609020101020101" pitchFamily="49" charset="-127"/>
+                          <a:ea typeface="D2Coding" panose="020B0609020101020101" pitchFamily="49" charset="-127"/>
+                        </a:rPr>
+                        <a:t>-5</a:t>
+                      </a:r>
+                      <a:endParaRPr lang="ko-KR" altLang="en-US" sz="1400" dirty="0">
+                        <a:latin typeface="D2Coding" panose="020B0609020101020101" pitchFamily="49" charset="-127"/>
+                        <a:ea typeface="D2Coding" panose="020B0609020101020101" pitchFamily="49" charset="-127"/>
+                      </a:endParaRPr>
+                    </a:p>
+                  </a:txBody>
+                  <a:tcPr/>
+                </a:tc>
+                <a:tc>
+                  <a:txBody>
+                    <a:bodyPr/>
+                    <a:lstStyle/>
+                    <a:p>
+                      <a:pPr algn="r" latinLnBrk="1"/>
+                      <a:r>
+                        <a:rPr lang="en-US" altLang="ko-KR" sz="1400" dirty="0">
+                          <a:latin typeface="D2Coding" panose="020B0609020101020101" pitchFamily="49" charset="-127"/>
+                          <a:ea typeface="D2Coding" panose="020B0609020101020101" pitchFamily="49" charset="-127"/>
+                        </a:rPr>
+                        <a:t>-5</a:t>
+                      </a:r>
+                      <a:endParaRPr lang="ko-KR" altLang="en-US" sz="1400" dirty="0">
+                        <a:latin typeface="D2Coding" panose="020B0609020101020101" pitchFamily="49" charset="-127"/>
+                        <a:ea typeface="D2Coding" panose="020B0609020101020101" pitchFamily="49" charset="-127"/>
+                      </a:endParaRPr>
+                    </a:p>
+                  </a:txBody>
+                  <a:tcPr/>
+                </a:tc>
+                <a:extLst>
+                  <a:ext uri="{0D108BD9-81ED-4DB2-BD59-A6C34878D82A}">
+                    <a16:rowId xmlns:a16="http://schemas.microsoft.com/office/drawing/2014/main" val="244328434"/>
+                  </a:ext>
+                </a:extLst>
+              </a:tr>
+              <a:tr h="347965">
+                <a:tc>
+                  <a:txBody>
+                    <a:bodyPr/>
+                    <a:lstStyle/>
+                    <a:p>
+                      <a:pPr algn="r" latinLnBrk="1"/>
+                      <a:r>
+                        <a:rPr lang="en-US" altLang="ko-KR" sz="1400" dirty="0">
+                          <a:latin typeface="D2Coding" panose="020B0609020101020101" pitchFamily="49" charset="-127"/>
+                          <a:ea typeface="D2Coding" panose="020B0609020101020101" pitchFamily="49" charset="-127"/>
+                        </a:rPr>
+                        <a:t>1</a:t>
+                      </a:r>
+                      <a:endParaRPr lang="ko-KR" altLang="en-US" sz="1400" dirty="0">
+                        <a:latin typeface="D2Coding" panose="020B0609020101020101" pitchFamily="49" charset="-127"/>
+                        <a:ea typeface="D2Coding" panose="020B0609020101020101" pitchFamily="49" charset="-127"/>
+                      </a:endParaRPr>
+                    </a:p>
+                  </a:txBody>
+                  <a:tcPr/>
+                </a:tc>
+                <a:tc>
+                  <a:txBody>
+                    <a:bodyPr/>
+                    <a:lstStyle/>
+                    <a:p>
+                      <a:pPr algn="r" latinLnBrk="1"/>
+                      <a:r>
+                        <a:rPr lang="en-US" altLang="ko-KR" sz="1400" dirty="0">
+                          <a:latin typeface="D2Coding" panose="020B0609020101020101" pitchFamily="49" charset="-127"/>
+                          <a:ea typeface="D2Coding" panose="020B0609020101020101" pitchFamily="49" charset="-127"/>
+                        </a:rPr>
+                        <a:t>-5</a:t>
+                      </a:r>
+                      <a:endParaRPr lang="ko-KR" altLang="en-US" sz="1400" dirty="0">
+                        <a:latin typeface="D2Coding" panose="020B0609020101020101" pitchFamily="49" charset="-127"/>
+                        <a:ea typeface="D2Coding" panose="020B0609020101020101" pitchFamily="49" charset="-127"/>
+                      </a:endParaRPr>
+                    </a:p>
+                  </a:txBody>
+                  <a:tcPr/>
+                </a:tc>
+                <a:tc>
+                  <a:txBody>
+                    <a:bodyPr/>
+                    <a:lstStyle/>
+                    <a:p>
+                      <a:pPr algn="r" latinLnBrk="1"/>
+                      <a:r>
+                        <a:rPr lang="en-US" altLang="ko-KR" sz="1400" dirty="0">
+                          <a:latin typeface="D2Coding" panose="020B0609020101020101" pitchFamily="49" charset="-127"/>
+                          <a:ea typeface="D2Coding" panose="020B0609020101020101" pitchFamily="49" charset="-127"/>
+                        </a:rPr>
+                        <a:t>-5</a:t>
+                      </a:r>
+                      <a:endParaRPr lang="ko-KR" altLang="en-US" sz="1400" dirty="0">
+                        <a:latin typeface="D2Coding" panose="020B0609020101020101" pitchFamily="49" charset="-127"/>
+                        <a:ea typeface="D2Coding" panose="020B0609020101020101" pitchFamily="49" charset="-127"/>
+                      </a:endParaRPr>
+                    </a:p>
+                  </a:txBody>
+                  <a:tcPr/>
+                </a:tc>
+                <a:extLst>
+                  <a:ext uri="{0D108BD9-81ED-4DB2-BD59-A6C34878D82A}">
+                    <a16:rowId xmlns:a16="http://schemas.microsoft.com/office/drawing/2014/main" val="4122078504"/>
+                  </a:ext>
+                </a:extLst>
+              </a:tr>
+            </a:tbl>
+          </a:graphicData>
+        </a:graphic>
+      </p:graphicFrame>
+      <p:graphicFrame>
+        <p:nvGraphicFramePr>
+          <p:cNvPr id="11" name="표 10">
+            <a:extLst>
+              <a:ext uri="{FF2B5EF4-FFF2-40B4-BE49-F238E27FC236}">
+                <a16:creationId xmlns:a16="http://schemas.microsoft.com/office/drawing/2014/main" id="{566EDAE3-4767-EED0-CBF5-AA17C014893E}"/>
+              </a:ext>
+            </a:extLst>
+          </p:cNvPr>
+          <p:cNvGraphicFramePr>
+            <a:graphicFrameLocks noGrp="1"/>
+          </p:cNvGraphicFramePr>
+          <p:nvPr>
+            <p:extLst>
+              <p:ext uri="{D42A27DB-BD31-4B8C-83A1-F6EECF244321}">
+                <p14:modId xmlns:p14="http://schemas.microsoft.com/office/powerpoint/2010/main" val="3340741551"/>
+              </p:ext>
+            </p:extLst>
+          </p:nvPr>
+        </p:nvGraphicFramePr>
+        <p:xfrm>
+          <a:off x="4720662" y="5249541"/>
+          <a:ext cx="1194363" cy="1043895"/>
+        </p:xfrm>
+        <a:graphic>
+          <a:graphicData uri="http://schemas.openxmlformats.org/drawingml/2006/table">
+            <a:tbl>
+              <a:tblPr firstRow="1" bandRow="1">
+                <a:tableStyleId>{5940675A-B579-460E-94D1-54222C63F5DA}</a:tableStyleId>
+              </a:tblPr>
+              <a:tblGrid>
+                <a:gridCol w="398121">
+                  <a:extLst>
+                    <a:ext uri="{9D8B030D-6E8A-4147-A177-3AD203B41FA5}">
+                      <a16:colId xmlns:a16="http://schemas.microsoft.com/office/drawing/2014/main" val="2786435963"/>
+                    </a:ext>
+                  </a:extLst>
+                </a:gridCol>
+                <a:gridCol w="398121">
+                  <a:extLst>
+                    <a:ext uri="{9D8B030D-6E8A-4147-A177-3AD203B41FA5}">
+                      <a16:colId xmlns:a16="http://schemas.microsoft.com/office/drawing/2014/main" val="3827515645"/>
+                    </a:ext>
+                  </a:extLst>
+                </a:gridCol>
+                <a:gridCol w="398121">
+                  <a:extLst>
+                    <a:ext uri="{9D8B030D-6E8A-4147-A177-3AD203B41FA5}">
+                      <a16:colId xmlns:a16="http://schemas.microsoft.com/office/drawing/2014/main" val="2827207180"/>
+                    </a:ext>
+                  </a:extLst>
+                </a:gridCol>
+              </a:tblGrid>
+              <a:tr h="347965">
+                <a:tc>
+                  <a:txBody>
+                    <a:bodyPr/>
+                    <a:lstStyle/>
+                    <a:p>
+                      <a:pPr algn="r" latinLnBrk="1"/>
+                      <a:r>
+                        <a:rPr lang="en-US" altLang="ko-KR" sz="1400" dirty="0">
+                          <a:latin typeface="D2Coding" panose="020B0609020101020101" pitchFamily="49" charset="-127"/>
+                          <a:ea typeface="D2Coding" panose="020B0609020101020101" pitchFamily="49" charset="-127"/>
+                        </a:rPr>
+                        <a:t>1</a:t>
+                      </a:r>
+                      <a:endParaRPr lang="ko-KR" altLang="en-US" sz="1400" dirty="0">
+                        <a:latin typeface="D2Coding" panose="020B0609020101020101" pitchFamily="49" charset="-127"/>
+                        <a:ea typeface="D2Coding" panose="020B0609020101020101" pitchFamily="49" charset="-127"/>
+                      </a:endParaRPr>
+                    </a:p>
+                  </a:txBody>
+                  <a:tcPr/>
+                </a:tc>
+                <a:tc>
+                  <a:txBody>
+                    <a:bodyPr/>
+                    <a:lstStyle/>
+                    <a:p>
+                      <a:pPr algn="r" latinLnBrk="1"/>
+                      <a:r>
+                        <a:rPr lang="en-US" altLang="ko-KR" sz="1400" dirty="0">
+                          <a:latin typeface="D2Coding" panose="020B0609020101020101" pitchFamily="49" charset="-127"/>
+                          <a:ea typeface="D2Coding" panose="020B0609020101020101" pitchFamily="49" charset="-127"/>
+                        </a:rPr>
+                        <a:t>1</a:t>
+                      </a:r>
+                      <a:endParaRPr lang="ko-KR" altLang="en-US" sz="1400" dirty="0">
+                        <a:latin typeface="D2Coding" panose="020B0609020101020101" pitchFamily="49" charset="-127"/>
+                        <a:ea typeface="D2Coding" panose="020B0609020101020101" pitchFamily="49" charset="-127"/>
+                      </a:endParaRPr>
+                    </a:p>
+                  </a:txBody>
+                  <a:tcPr/>
+                </a:tc>
+                <a:tc>
+                  <a:txBody>
+                    <a:bodyPr/>
+                    <a:lstStyle/>
+                    <a:p>
+                      <a:pPr algn="r" latinLnBrk="1"/>
+                      <a:r>
+                        <a:rPr lang="en-US" altLang="ko-KR" sz="1400" dirty="0">
+                          <a:latin typeface="D2Coding" panose="020B0609020101020101" pitchFamily="49" charset="-127"/>
+                          <a:ea typeface="D2Coding" panose="020B0609020101020101" pitchFamily="49" charset="-127"/>
+                        </a:rPr>
+                        <a:t>1</a:t>
+                      </a:r>
+                      <a:endParaRPr lang="ko-KR" altLang="en-US" sz="1400" dirty="0">
+                        <a:latin typeface="D2Coding" panose="020B0609020101020101" pitchFamily="49" charset="-127"/>
+                        <a:ea typeface="D2Coding" panose="020B0609020101020101" pitchFamily="49" charset="-127"/>
+                      </a:endParaRPr>
+                    </a:p>
+                  </a:txBody>
+                  <a:tcPr/>
+                </a:tc>
+                <a:extLst>
+                  <a:ext uri="{0D108BD9-81ED-4DB2-BD59-A6C34878D82A}">
+                    <a16:rowId xmlns:a16="http://schemas.microsoft.com/office/drawing/2014/main" val="1894483622"/>
+                  </a:ext>
+                </a:extLst>
+              </a:tr>
+              <a:tr h="347965">
+                <a:tc>
+                  <a:txBody>
+                    <a:bodyPr/>
+                    <a:lstStyle/>
+                    <a:p>
+                      <a:pPr algn="r" latinLnBrk="1"/>
+                      <a:r>
+                        <a:rPr lang="en-US" altLang="ko-KR" sz="1400" dirty="0">
+                          <a:latin typeface="D2Coding" panose="020B0609020101020101" pitchFamily="49" charset="-127"/>
+                          <a:ea typeface="D2Coding" panose="020B0609020101020101" pitchFamily="49" charset="-127"/>
+                        </a:rPr>
+                        <a:t>1</a:t>
+                      </a:r>
+                      <a:endParaRPr lang="ko-KR" altLang="en-US" sz="1400" dirty="0">
+                        <a:latin typeface="D2Coding" panose="020B0609020101020101" pitchFamily="49" charset="-127"/>
+                        <a:ea typeface="D2Coding" panose="020B0609020101020101" pitchFamily="49" charset="-127"/>
+                      </a:endParaRPr>
+                    </a:p>
+                  </a:txBody>
+                  <a:tcPr/>
+                </a:tc>
+                <a:tc>
+                  <a:txBody>
+                    <a:bodyPr/>
+                    <a:lstStyle/>
+                    <a:p>
+                      <a:pPr algn="r" latinLnBrk="1"/>
+                      <a:r>
+                        <a:rPr lang="en-US" altLang="ko-KR" sz="1400" dirty="0">
+                          <a:latin typeface="D2Coding" panose="020B0609020101020101" pitchFamily="49" charset="-127"/>
+                          <a:ea typeface="D2Coding" panose="020B0609020101020101" pitchFamily="49" charset="-127"/>
+                        </a:rPr>
+                        <a:t>-5</a:t>
+                      </a:r>
+                      <a:endParaRPr lang="ko-KR" altLang="en-US" sz="1400" dirty="0">
+                        <a:latin typeface="D2Coding" panose="020B0609020101020101" pitchFamily="49" charset="-127"/>
+                        <a:ea typeface="D2Coding" panose="020B0609020101020101" pitchFamily="49" charset="-127"/>
+                      </a:endParaRPr>
+                    </a:p>
+                  </a:txBody>
+                  <a:tcPr/>
+                </a:tc>
+                <a:tc>
+                  <a:txBody>
+                    <a:bodyPr/>
+                    <a:lstStyle/>
+                    <a:p>
+                      <a:pPr algn="r" latinLnBrk="1"/>
+                      <a:r>
+                        <a:rPr lang="en-US" altLang="ko-KR" sz="1400" dirty="0">
+                          <a:latin typeface="D2Coding" panose="020B0609020101020101" pitchFamily="49" charset="-127"/>
+                          <a:ea typeface="D2Coding" panose="020B0609020101020101" pitchFamily="49" charset="-127"/>
+                        </a:rPr>
+                        <a:t>-5</a:t>
+                      </a:r>
+                      <a:endParaRPr lang="ko-KR" altLang="en-US" sz="1400" dirty="0">
+                        <a:latin typeface="D2Coding" panose="020B0609020101020101" pitchFamily="49" charset="-127"/>
+                        <a:ea typeface="D2Coding" panose="020B0609020101020101" pitchFamily="49" charset="-127"/>
+                      </a:endParaRPr>
+                    </a:p>
+                  </a:txBody>
+                  <a:tcPr/>
+                </a:tc>
+                <a:extLst>
+                  <a:ext uri="{0D108BD9-81ED-4DB2-BD59-A6C34878D82A}">
+                    <a16:rowId xmlns:a16="http://schemas.microsoft.com/office/drawing/2014/main" val="244328434"/>
+                  </a:ext>
+                </a:extLst>
+              </a:tr>
+              <a:tr h="347965">
+                <a:tc>
+                  <a:txBody>
+                    <a:bodyPr/>
+                    <a:lstStyle/>
+                    <a:p>
+                      <a:pPr algn="r" latinLnBrk="1"/>
+                      <a:r>
+                        <a:rPr lang="en-US" altLang="ko-KR" sz="1400" dirty="0">
+                          <a:latin typeface="D2Coding" panose="020B0609020101020101" pitchFamily="49" charset="-127"/>
+                          <a:ea typeface="D2Coding" panose="020B0609020101020101" pitchFamily="49" charset="-127"/>
+                        </a:rPr>
+                        <a:t>-5</a:t>
+                      </a:r>
+                      <a:endParaRPr lang="ko-KR" altLang="en-US" sz="1400" dirty="0">
+                        <a:latin typeface="D2Coding" panose="020B0609020101020101" pitchFamily="49" charset="-127"/>
+                        <a:ea typeface="D2Coding" panose="020B0609020101020101" pitchFamily="49" charset="-127"/>
+                      </a:endParaRPr>
+                    </a:p>
+                  </a:txBody>
+                  <a:tcPr/>
+                </a:tc>
+                <a:tc>
+                  <a:txBody>
+                    <a:bodyPr/>
+                    <a:lstStyle/>
+                    <a:p>
+                      <a:pPr algn="r" latinLnBrk="1"/>
+                      <a:r>
+                        <a:rPr lang="en-US" altLang="ko-KR" sz="1400" dirty="0">
+                          <a:latin typeface="D2Coding" panose="020B0609020101020101" pitchFamily="49" charset="-127"/>
+                          <a:ea typeface="D2Coding" panose="020B0609020101020101" pitchFamily="49" charset="-127"/>
+                        </a:rPr>
+                        <a:t>-5</a:t>
+                      </a:r>
+                      <a:endParaRPr lang="ko-KR" altLang="en-US" sz="1400" dirty="0">
+                        <a:latin typeface="D2Coding" panose="020B0609020101020101" pitchFamily="49" charset="-127"/>
+                        <a:ea typeface="D2Coding" panose="020B0609020101020101" pitchFamily="49" charset="-127"/>
+                      </a:endParaRPr>
+                    </a:p>
+                  </a:txBody>
+                  <a:tcPr/>
+                </a:tc>
+                <a:tc>
+                  <a:txBody>
+                    <a:bodyPr/>
+                    <a:lstStyle/>
+                    <a:p>
+                      <a:pPr algn="r" latinLnBrk="1"/>
+                      <a:r>
+                        <a:rPr lang="en-US" altLang="ko-KR" sz="1400" dirty="0">
+                          <a:latin typeface="D2Coding" panose="020B0609020101020101" pitchFamily="49" charset="-127"/>
+                          <a:ea typeface="D2Coding" panose="020B0609020101020101" pitchFamily="49" charset="-127"/>
+                        </a:rPr>
+                        <a:t>-5</a:t>
+                      </a:r>
+                      <a:endParaRPr lang="ko-KR" altLang="en-US" sz="1400" dirty="0">
+                        <a:latin typeface="D2Coding" panose="020B0609020101020101" pitchFamily="49" charset="-127"/>
+                        <a:ea typeface="D2Coding" panose="020B0609020101020101" pitchFamily="49" charset="-127"/>
+                      </a:endParaRPr>
+                    </a:p>
+                  </a:txBody>
+                  <a:tcPr/>
+                </a:tc>
+                <a:extLst>
+                  <a:ext uri="{0D108BD9-81ED-4DB2-BD59-A6C34878D82A}">
+                    <a16:rowId xmlns:a16="http://schemas.microsoft.com/office/drawing/2014/main" val="4122078504"/>
+                  </a:ext>
+                </a:extLst>
+              </a:tr>
+            </a:tbl>
+          </a:graphicData>
+        </a:graphic>
+      </p:graphicFrame>
+      <p:cxnSp>
+        <p:nvCxnSpPr>
+          <p:cNvPr id="13" name="직선 화살표 연결선 12">
+            <a:extLst>
+              <a:ext uri="{FF2B5EF4-FFF2-40B4-BE49-F238E27FC236}">
+                <a16:creationId xmlns:a16="http://schemas.microsoft.com/office/drawing/2014/main" id="{309FC970-6C0C-5210-5CF8-DF8A8688AA9F}"/>
+              </a:ext>
+            </a:extLst>
+          </p:cNvPr>
+          <p:cNvCxnSpPr/>
+          <p:nvPr/>
+        </p:nvCxnSpPr>
+        <p:spPr>
+          <a:xfrm>
+            <a:off x="6448425" y="2428767"/>
+            <a:ext cx="638175" cy="0"/>
+          </a:xfrm>
+          <a:prstGeom prst="straightConnector1">
+            <a:avLst/>
+          </a:prstGeom>
+          <a:ln>
+            <a:tailEnd type="triangle"/>
+          </a:ln>
+        </p:spPr>
+        <p:style>
+          <a:lnRef idx="1">
+            <a:schemeClr val="dk1"/>
+          </a:lnRef>
+          <a:fillRef idx="0">
+            <a:schemeClr val="dk1"/>
+          </a:fillRef>
+          <a:effectRef idx="0">
+            <a:schemeClr val="dk1"/>
+          </a:effectRef>
+          <a:fontRef idx="minor">
+            <a:schemeClr val="tx1"/>
+          </a:fontRef>
+        </p:style>
+      </p:cxnSp>
+      <p:pic>
+        <p:nvPicPr>
+          <p:cNvPr id="15" name="그림 14">
+            <a:extLst>
+              <a:ext uri="{FF2B5EF4-FFF2-40B4-BE49-F238E27FC236}">
+                <a16:creationId xmlns:a16="http://schemas.microsoft.com/office/drawing/2014/main" id="{D7FCB08B-66F4-87B4-F20A-1C1F228A178F}"/>
+              </a:ext>
+            </a:extLst>
+          </p:cNvPr>
+          <p:cNvPicPr>
+            <a:picLocks noChangeAspect="1"/>
+          </p:cNvPicPr>
+          <p:nvPr/>
+        </p:nvPicPr>
+        <p:blipFill>
+          <a:blip r:embed="rId3">
+            <a:duotone>
+              <a:schemeClr val="accent5">
+                <a:shade val="45000"/>
+                <a:satMod val="135000"/>
+              </a:schemeClr>
+              <a:prstClr val="white"/>
+            </a:duotone>
+          </a:blip>
+          <a:stretch>
+            <a:fillRect/>
+          </a:stretch>
+        </p:blipFill>
+        <p:spPr>
+          <a:xfrm>
+            <a:off x="7269368" y="1972671"/>
+            <a:ext cx="1275596" cy="932453"/>
+          </a:xfrm>
+          <a:prstGeom prst="rect">
+            <a:avLst/>
+          </a:prstGeom>
+        </p:spPr>
+      </p:pic>
+      <p:cxnSp>
+        <p:nvCxnSpPr>
+          <p:cNvPr id="16" name="직선 화살표 연결선 15">
+            <a:extLst>
+              <a:ext uri="{FF2B5EF4-FFF2-40B4-BE49-F238E27FC236}">
+                <a16:creationId xmlns:a16="http://schemas.microsoft.com/office/drawing/2014/main" id="{A3FF9ECC-D489-D531-04CB-660570D27766}"/>
+              </a:ext>
+            </a:extLst>
+          </p:cNvPr>
+          <p:cNvCxnSpPr/>
+          <p:nvPr/>
+        </p:nvCxnSpPr>
+        <p:spPr>
+          <a:xfrm>
+            <a:off x="6448425" y="4085469"/>
+            <a:ext cx="638175" cy="0"/>
+          </a:xfrm>
+          <a:prstGeom prst="straightConnector1">
+            <a:avLst/>
+          </a:prstGeom>
+          <a:ln>
+            <a:tailEnd type="triangle"/>
+          </a:ln>
+        </p:spPr>
+        <p:style>
+          <a:lnRef idx="1">
+            <a:schemeClr val="dk1"/>
+          </a:lnRef>
+          <a:fillRef idx="0">
+            <a:schemeClr val="dk1"/>
+          </a:fillRef>
+          <a:effectRef idx="0">
+            <a:schemeClr val="dk1"/>
+          </a:effectRef>
+          <a:fontRef idx="minor">
+            <a:schemeClr val="tx1"/>
+          </a:fontRef>
+        </p:style>
+      </p:cxnSp>
+      <p:pic>
+        <p:nvPicPr>
+          <p:cNvPr id="17" name="그림 16">
+            <a:extLst>
+              <a:ext uri="{FF2B5EF4-FFF2-40B4-BE49-F238E27FC236}">
+                <a16:creationId xmlns:a16="http://schemas.microsoft.com/office/drawing/2014/main" id="{ED2C4F28-A8D7-E629-52F3-B22D35BF1DBF}"/>
+              </a:ext>
+            </a:extLst>
+          </p:cNvPr>
+          <p:cNvPicPr>
+            <a:picLocks noChangeAspect="1"/>
+          </p:cNvPicPr>
+          <p:nvPr/>
+        </p:nvPicPr>
+        <p:blipFill>
+          <a:blip r:embed="rId3">
+            <a:duotone>
+              <a:schemeClr val="accent5">
+                <a:shade val="45000"/>
+                <a:satMod val="135000"/>
+              </a:schemeClr>
+              <a:prstClr val="white"/>
+            </a:duotone>
+          </a:blip>
+          <a:stretch>
+            <a:fillRect/>
+          </a:stretch>
+        </p:blipFill>
+        <p:spPr>
+          <a:xfrm>
+            <a:off x="7269368" y="3629373"/>
+            <a:ext cx="1275596" cy="932453"/>
+          </a:xfrm>
+          <a:prstGeom prst="rect">
+            <a:avLst/>
+          </a:prstGeom>
+        </p:spPr>
+      </p:pic>
+      <p:cxnSp>
+        <p:nvCxnSpPr>
+          <p:cNvPr id="18" name="직선 화살표 연결선 17">
+            <a:extLst>
+              <a:ext uri="{FF2B5EF4-FFF2-40B4-BE49-F238E27FC236}">
+                <a16:creationId xmlns:a16="http://schemas.microsoft.com/office/drawing/2014/main" id="{076D93C3-BD31-7E72-215F-5FE172046051}"/>
+              </a:ext>
+            </a:extLst>
+          </p:cNvPr>
+          <p:cNvCxnSpPr/>
+          <p:nvPr/>
+        </p:nvCxnSpPr>
+        <p:spPr>
+          <a:xfrm>
+            <a:off x="6448425" y="5724417"/>
+            <a:ext cx="638175" cy="0"/>
+          </a:xfrm>
+          <a:prstGeom prst="straightConnector1">
+            <a:avLst/>
+          </a:prstGeom>
+          <a:ln>
+            <a:tailEnd type="triangle"/>
+          </a:ln>
+        </p:spPr>
+        <p:style>
+          <a:lnRef idx="1">
+            <a:schemeClr val="dk1"/>
+          </a:lnRef>
+          <a:fillRef idx="0">
+            <a:schemeClr val="dk1"/>
+          </a:fillRef>
+          <a:effectRef idx="0">
+            <a:schemeClr val="dk1"/>
+          </a:effectRef>
+          <a:fontRef idx="minor">
+            <a:schemeClr val="tx1"/>
+          </a:fontRef>
+        </p:style>
+      </p:cxnSp>
+      <p:pic>
+        <p:nvPicPr>
+          <p:cNvPr id="19" name="그림 18">
+            <a:extLst>
+              <a:ext uri="{FF2B5EF4-FFF2-40B4-BE49-F238E27FC236}">
+                <a16:creationId xmlns:a16="http://schemas.microsoft.com/office/drawing/2014/main" id="{8C2480E6-96FC-6497-206C-4BFB17FE1934}"/>
+              </a:ext>
+            </a:extLst>
+          </p:cNvPr>
+          <p:cNvPicPr>
+            <a:picLocks noChangeAspect="1"/>
+          </p:cNvPicPr>
+          <p:nvPr/>
+        </p:nvPicPr>
+        <p:blipFill>
+          <a:blip r:embed="rId3">
+            <a:duotone>
+              <a:schemeClr val="accent5">
+                <a:shade val="45000"/>
+                <a:satMod val="135000"/>
+              </a:schemeClr>
+              <a:prstClr val="white"/>
+            </a:duotone>
+          </a:blip>
+          <a:stretch>
+            <a:fillRect/>
+          </a:stretch>
+        </p:blipFill>
+        <p:spPr>
+          <a:xfrm>
+            <a:off x="7269368" y="5268321"/>
+            <a:ext cx="1275596" cy="932453"/>
+          </a:xfrm>
+          <a:prstGeom prst="rect">
+            <a:avLst/>
+          </a:prstGeom>
+        </p:spPr>
+      </p:pic>
+      <p:sp>
+        <p:nvSpPr>
+          <p:cNvPr id="20" name="TextBox 19">
+            <a:extLst>
+              <a:ext uri="{FF2B5EF4-FFF2-40B4-BE49-F238E27FC236}">
+                <a16:creationId xmlns:a16="http://schemas.microsoft.com/office/drawing/2014/main" id="{FC829464-9279-84EB-6813-6716E7DE07F4}"/>
+              </a:ext>
+            </a:extLst>
+          </p:cNvPr>
+          <p:cNvSpPr txBox="1"/>
+          <p:nvPr/>
+        </p:nvSpPr>
+        <p:spPr>
+          <a:xfrm>
+            <a:off x="4558164" y="1446528"/>
+            <a:ext cx="1890261" cy="307777"/>
+          </a:xfrm>
+          <a:prstGeom prst="rect">
+            <a:avLst/>
+          </a:prstGeom>
+          <a:noFill/>
+        </p:spPr>
+        <p:txBody>
+          <a:bodyPr wrap="none" rtlCol="0">
+            <a:spAutoFit/>
+          </a:bodyPr>
+          <a:lstStyle/>
+          <a:p>
+            <a:r>
+              <a:rPr lang="en-US" altLang="ko-KR" sz="1400" dirty="0">
+                <a:latin typeface="D2Coding" panose="020B0609020101020101" pitchFamily="49" charset="-127"/>
+                <a:ea typeface="D2Coding" panose="020B0609020101020101" pitchFamily="49" charset="-127"/>
+              </a:rPr>
+              <a:t>Horizontal/Diagonal</a:t>
+            </a:r>
+            <a:endParaRPr lang="ko-KR" altLang="en-US" sz="1400" dirty="0">
+              <a:latin typeface="D2Coding" panose="020B0609020101020101" pitchFamily="49" charset="-127"/>
+              <a:ea typeface="D2Coding" panose="020B0609020101020101" pitchFamily="49" charset="-127"/>
+            </a:endParaRPr>
+          </a:p>
+        </p:txBody>
+      </p:sp>
+      <p:sp>
+        <p:nvSpPr>
+          <p:cNvPr id="21" name="TextBox 20">
+            <a:extLst>
+              <a:ext uri="{FF2B5EF4-FFF2-40B4-BE49-F238E27FC236}">
+                <a16:creationId xmlns:a16="http://schemas.microsoft.com/office/drawing/2014/main" id="{229C038D-B952-75DF-7487-E820508392FE}"/>
+              </a:ext>
+            </a:extLst>
+          </p:cNvPr>
+          <p:cNvSpPr txBox="1"/>
+          <p:nvPr/>
+        </p:nvSpPr>
+        <p:spPr>
+          <a:xfrm>
+            <a:off x="4463200" y="3170454"/>
+            <a:ext cx="902811" cy="307777"/>
+          </a:xfrm>
+          <a:prstGeom prst="rect">
+            <a:avLst/>
+          </a:prstGeom>
+          <a:noFill/>
+        </p:spPr>
+        <p:txBody>
+          <a:bodyPr wrap="none" rtlCol="0">
+            <a:spAutoFit/>
+          </a:bodyPr>
+          <a:lstStyle/>
+          <a:p>
+            <a:r>
+              <a:rPr lang="en-US" altLang="ko-KR" sz="1400" dirty="0">
+                <a:latin typeface="D2Coding" panose="020B0609020101020101" pitchFamily="49" charset="-127"/>
+                <a:ea typeface="D2Coding" panose="020B0609020101020101" pitchFamily="49" charset="-127"/>
+              </a:rPr>
+              <a:t>Vertical</a:t>
+            </a:r>
+            <a:endParaRPr lang="ko-KR" altLang="en-US" sz="1400" dirty="0">
+              <a:latin typeface="D2Coding" panose="020B0609020101020101" pitchFamily="49" charset="-127"/>
+              <a:ea typeface="D2Coding" panose="020B0609020101020101" pitchFamily="49" charset="-127"/>
+            </a:endParaRPr>
+          </a:p>
+        </p:txBody>
+      </p:sp>
+      <p:sp>
+        <p:nvSpPr>
+          <p:cNvPr id="22" name="TextBox 21">
+            <a:extLst>
+              <a:ext uri="{FF2B5EF4-FFF2-40B4-BE49-F238E27FC236}">
+                <a16:creationId xmlns:a16="http://schemas.microsoft.com/office/drawing/2014/main" id="{57957353-B9AF-67E0-FD62-F604366BA6B8}"/>
+              </a:ext>
+            </a:extLst>
+          </p:cNvPr>
+          <p:cNvSpPr txBox="1"/>
+          <p:nvPr/>
+        </p:nvSpPr>
+        <p:spPr>
+          <a:xfrm>
+            <a:off x="4457111" y="4894380"/>
+            <a:ext cx="543739" cy="307777"/>
+          </a:xfrm>
+          <a:prstGeom prst="rect">
+            <a:avLst/>
+          </a:prstGeom>
+          <a:noFill/>
+        </p:spPr>
+        <p:txBody>
+          <a:bodyPr wrap="none" rtlCol="0">
+            <a:spAutoFit/>
+          </a:bodyPr>
+          <a:lstStyle/>
+          <a:p>
+            <a:r>
+              <a:rPr lang="en-US" altLang="ko-KR" sz="1400" dirty="0">
+                <a:latin typeface="D2Coding" panose="020B0609020101020101" pitchFamily="49" charset="-127"/>
+                <a:ea typeface="D2Coding" panose="020B0609020101020101" pitchFamily="49" charset="-127"/>
+              </a:rPr>
+              <a:t>Loop</a:t>
+            </a:r>
+            <a:endParaRPr lang="ko-KR" altLang="en-US" sz="1400" dirty="0">
+              <a:latin typeface="D2Coding" panose="020B0609020101020101" pitchFamily="49" charset="-127"/>
+              <a:ea typeface="D2Coding" panose="020B0609020101020101" pitchFamily="49" charset="-127"/>
+            </a:endParaRPr>
+          </a:p>
+        </p:txBody>
+      </p:sp>
+      <p:cxnSp>
+        <p:nvCxnSpPr>
+          <p:cNvPr id="23" name="직선 화살표 연결선 22">
+            <a:extLst>
+              <a:ext uri="{FF2B5EF4-FFF2-40B4-BE49-F238E27FC236}">
+                <a16:creationId xmlns:a16="http://schemas.microsoft.com/office/drawing/2014/main" id="{B3822090-781C-26D4-44D4-D099E1A52510}"/>
+              </a:ext>
+            </a:extLst>
+          </p:cNvPr>
+          <p:cNvCxnSpPr/>
+          <p:nvPr/>
+        </p:nvCxnSpPr>
+        <p:spPr>
+          <a:xfrm>
+            <a:off x="3818936" y="4075836"/>
+            <a:ext cx="638175" cy="0"/>
+          </a:xfrm>
+          <a:prstGeom prst="straightConnector1">
+            <a:avLst/>
+          </a:prstGeom>
+          <a:ln>
+            <a:tailEnd type="triangle"/>
+          </a:ln>
+        </p:spPr>
+        <p:style>
+          <a:lnRef idx="1">
+            <a:schemeClr val="dk1"/>
+          </a:lnRef>
+          <a:fillRef idx="0">
+            <a:schemeClr val="dk1"/>
+          </a:fillRef>
+          <a:effectRef idx="0">
+            <a:schemeClr val="dk1"/>
+          </a:effectRef>
+          <a:fontRef idx="minor">
+            <a:schemeClr val="tx1"/>
+          </a:fontRef>
+        </p:style>
+      </p:cxnSp>
+      <p:cxnSp>
+        <p:nvCxnSpPr>
+          <p:cNvPr id="24" name="직선 화살표 연결선 23">
+            <a:extLst>
+              <a:ext uri="{FF2B5EF4-FFF2-40B4-BE49-F238E27FC236}">
+                <a16:creationId xmlns:a16="http://schemas.microsoft.com/office/drawing/2014/main" id="{F29216AF-ED58-F476-6F5F-2AE0673A1E56}"/>
+              </a:ext>
+            </a:extLst>
+          </p:cNvPr>
+          <p:cNvCxnSpPr>
+            <a:cxnSpLocks/>
+          </p:cNvCxnSpPr>
+          <p:nvPr/>
+        </p:nvCxnSpPr>
+        <p:spPr>
+          <a:xfrm>
+            <a:off x="3742736" y="5495061"/>
+            <a:ext cx="543514" cy="229356"/>
+          </a:xfrm>
+          <a:prstGeom prst="straightConnector1">
+            <a:avLst/>
+          </a:prstGeom>
+          <a:ln>
+            <a:tailEnd type="triangle"/>
+          </a:ln>
+        </p:spPr>
+        <p:style>
+          <a:lnRef idx="1">
+            <a:schemeClr val="dk1"/>
+          </a:lnRef>
+          <a:fillRef idx="0">
+            <a:schemeClr val="dk1"/>
+          </a:fillRef>
+          <a:effectRef idx="0">
+            <a:schemeClr val="dk1"/>
+          </a:effectRef>
+          <a:fontRef idx="minor">
+            <a:schemeClr val="tx1"/>
+          </a:fontRef>
+        </p:style>
+      </p:cxnSp>
+      <p:cxnSp>
+        <p:nvCxnSpPr>
+          <p:cNvPr id="25" name="직선 화살표 연결선 24">
+            <a:extLst>
+              <a:ext uri="{FF2B5EF4-FFF2-40B4-BE49-F238E27FC236}">
+                <a16:creationId xmlns:a16="http://schemas.microsoft.com/office/drawing/2014/main" id="{66498FB2-D6A6-1546-F077-2010C4599970}"/>
+              </a:ext>
+            </a:extLst>
+          </p:cNvPr>
+          <p:cNvCxnSpPr>
+            <a:cxnSpLocks/>
+          </p:cNvCxnSpPr>
+          <p:nvPr/>
+        </p:nvCxnSpPr>
+        <p:spPr>
+          <a:xfrm flipV="1">
+            <a:off x="3818936" y="2428767"/>
+            <a:ext cx="467314" cy="218319"/>
+          </a:xfrm>
+          <a:prstGeom prst="straightConnector1">
+            <a:avLst/>
+          </a:prstGeom>
+          <a:ln>
+            <a:tailEnd type="triangle"/>
+          </a:ln>
+        </p:spPr>
+        <p:style>
+          <a:lnRef idx="1">
+            <a:schemeClr val="dk1"/>
+          </a:lnRef>
+          <a:fillRef idx="0">
+            <a:schemeClr val="dk1"/>
+          </a:fillRef>
+          <a:effectRef idx="0">
+            <a:schemeClr val="dk1"/>
+          </a:effectRef>
+          <a:fontRef idx="minor">
+            <a:schemeClr val="tx1"/>
+          </a:fontRef>
+        </p:style>
+      </p:cxnSp>
+      <p:sp>
+        <p:nvSpPr>
+          <p:cNvPr id="29" name="화살표: 오른쪽 28">
+            <a:extLst>
+              <a:ext uri="{FF2B5EF4-FFF2-40B4-BE49-F238E27FC236}">
+                <a16:creationId xmlns:a16="http://schemas.microsoft.com/office/drawing/2014/main" id="{874F86C5-F736-36B6-94DA-A81A5A3E5C42}"/>
+              </a:ext>
+            </a:extLst>
+          </p:cNvPr>
+          <p:cNvSpPr/>
+          <p:nvPr/>
+        </p:nvSpPr>
+        <p:spPr>
+          <a:xfrm>
+            <a:off x="9187330" y="2347791"/>
+            <a:ext cx="2598503" cy="3141743"/>
+          </a:xfrm>
+          <a:prstGeom prst="rightArrow">
+            <a:avLst>
+              <a:gd name="adj1" fmla="val 73016"/>
+              <a:gd name="adj2" fmla="val 50000"/>
+            </a:avLst>
+          </a:prstGeom>
+          <a:solidFill>
+            <a:schemeClr val="bg1">
+              <a:lumMod val="85000"/>
+            </a:schemeClr>
+          </a:solidFill>
+        </p:spPr>
+        <p:style>
+          <a:lnRef idx="2">
+            <a:schemeClr val="accent1">
+              <a:shade val="15000"/>
+            </a:schemeClr>
+          </a:lnRef>
+          <a:fillRef idx="1">
+            <a:schemeClr val="accent1"/>
+          </a:fillRef>
+          <a:effectRef idx="0">
+            <a:schemeClr val="accent1"/>
+          </a:effectRef>
+          <a:fontRef idx="minor">
+            <a:schemeClr val="lt1"/>
+          </a:fontRef>
+        </p:style>
+        <p:txBody>
+          <a:bodyPr rtlCol="0" anchor="ctr"/>
+          <a:lstStyle/>
+          <a:p>
+            <a:pPr algn="ctr"/>
+            <a:r>
+              <a:rPr lang="ko-KR" altLang="en-US" dirty="0">
+                <a:solidFill>
+                  <a:schemeClr val="tx1"/>
+                </a:solidFill>
+                <a:latin typeface="D2Coding" panose="020B0609020101020101" pitchFamily="49" charset="-127"/>
+                <a:ea typeface="D2Coding" panose="020B0609020101020101" pitchFamily="49" charset="-127"/>
+              </a:rPr>
+              <a:t>각각의</a:t>
+            </a:r>
+            <a:r>
+              <a:rPr lang="en-US" altLang="ko-KR" dirty="0">
+                <a:solidFill>
+                  <a:schemeClr val="tx1"/>
+                </a:solidFill>
+                <a:latin typeface="D2Coding" panose="020B0609020101020101" pitchFamily="49" charset="-127"/>
+                <a:ea typeface="D2Coding" panose="020B0609020101020101" pitchFamily="49" charset="-127"/>
+              </a:rPr>
+              <a:t> Kernel (Filter)</a:t>
+            </a:r>
+            <a:r>
+              <a:rPr lang="ko-KR" altLang="en-US" dirty="0">
+                <a:solidFill>
+                  <a:schemeClr val="tx1"/>
+                </a:solidFill>
+                <a:latin typeface="D2Coding" panose="020B0609020101020101" pitchFamily="49" charset="-127"/>
+                <a:ea typeface="D2Coding" panose="020B0609020101020101" pitchFamily="49" charset="-127"/>
+              </a:rPr>
+              <a:t>의 </a:t>
+            </a:r>
+            <a:r>
+              <a:rPr lang="en-US" altLang="ko-KR" dirty="0" err="1">
+                <a:solidFill>
+                  <a:schemeClr val="tx1"/>
+                </a:solidFill>
+                <a:latin typeface="D2Coding" panose="020B0609020101020101" pitchFamily="49" charset="-127"/>
+                <a:ea typeface="D2Coding" panose="020B0609020101020101" pitchFamily="49" charset="-127"/>
+              </a:rPr>
+              <a:t>Relu</a:t>
+            </a:r>
+            <a:r>
+              <a:rPr lang="en-US" altLang="ko-KR" dirty="0">
+                <a:solidFill>
+                  <a:schemeClr val="tx1"/>
+                </a:solidFill>
+                <a:latin typeface="D2Coding" panose="020B0609020101020101" pitchFamily="49" charset="-127"/>
+                <a:ea typeface="D2Coding" panose="020B0609020101020101" pitchFamily="49" charset="-127"/>
+              </a:rPr>
+              <a:t> </a:t>
+            </a:r>
+            <a:r>
+              <a:rPr lang="ko-KR" altLang="en-US" dirty="0">
+                <a:solidFill>
+                  <a:schemeClr val="tx1"/>
+                </a:solidFill>
+                <a:latin typeface="D2Coding" panose="020B0609020101020101" pitchFamily="49" charset="-127"/>
+                <a:ea typeface="D2Coding" panose="020B0609020101020101" pitchFamily="49" charset="-127"/>
+              </a:rPr>
+              <a:t>결과를 구한 후 모두 더하면</a:t>
+            </a:r>
+          </a:p>
+          <a:p>
+            <a:pPr algn="ctr"/>
+            <a:endParaRPr lang="ko-KR" altLang="en-US" dirty="0"/>
+          </a:p>
+        </p:txBody>
+      </p:sp>
+    </p:spTree>
+    <p:extLst>
+      <p:ext uri="{BB962C8B-B14F-4D97-AF65-F5344CB8AC3E}">
+        <p14:creationId xmlns:p14="http://schemas.microsoft.com/office/powerpoint/2010/main" val="717681548"/>
+      </p:ext>
+    </p:extLst>
+  </p:cSld>
+  <p:clrMapOvr>
+    <a:masterClrMapping/>
+  </p:clrMapOvr>
+</p:sld>
+</file>
+
+<file path=ppt/slides/slide6.xml><?xml version="1.0" encoding="utf-8"?>
+<p:sld xmlns:a="http://schemas.openxmlformats.org/drawingml/2006/main" xmlns:r="http://schemas.openxmlformats.org/officeDocument/2006/relationships" xmlns:p="http://schemas.openxmlformats.org/presentationml/2006/main">
+  <p:cSld>
+    <p:spTree>
+      <p:nvGrpSpPr>
+        <p:cNvPr id="1" name="">
+          <a:extLst>
+            <a:ext uri="{FF2B5EF4-FFF2-40B4-BE49-F238E27FC236}">
+              <a16:creationId xmlns:a16="http://schemas.microsoft.com/office/drawing/2014/main" id="{2E904758-D90C-D4C6-EB41-2CB55EACEE21}"/>
+            </a:ext>
+          </a:extLst>
+        </p:cNvPr>
+        <p:cNvGrpSpPr/>
+        <p:nvPr/>
+      </p:nvGrpSpPr>
+      <p:grpSpPr>
+        <a:xfrm>
+          <a:off x="0" y="0"/>
+          <a:ext cx="0" cy="0"/>
+          <a:chOff x="0" y="0"/>
+          <a:chExt cx="0" cy="0"/>
+        </a:xfrm>
+      </p:grpSpPr>
+      <p:sp>
+        <p:nvSpPr>
+          <p:cNvPr id="4" name="슬라이드 번호 개체 틀 3">
+            <a:extLst>
+              <a:ext uri="{FF2B5EF4-FFF2-40B4-BE49-F238E27FC236}">
+                <a16:creationId xmlns:a16="http://schemas.microsoft.com/office/drawing/2014/main" id="{3DAAE4BC-6ECA-D1AC-38AB-C93BACD30E8C}"/>
+              </a:ext>
+            </a:extLst>
+          </p:cNvPr>
+          <p:cNvSpPr>
+            <a:spLocks noGrp="1"/>
+          </p:cNvSpPr>
+          <p:nvPr>
+            <p:ph type="sldNum" sz="quarter" idx="12"/>
+          </p:nvPr>
+        </p:nvSpPr>
+        <p:spPr>
+          <a:xfrm>
+            <a:off x="10514011" y="6036261"/>
+            <a:ext cx="753545" cy="365125"/>
+          </a:xfrm>
+        </p:spPr>
+        <p:txBody>
+          <a:bodyPr/>
+          <a:lstStyle/>
+          <a:p>
+            <a:fld id="{D57F1E4F-1CFF-5643-939E-217C01CDF565}" type="slidenum">
+              <a:rPr lang="en-US" smtClean="0"/>
+              <a:pPr/>
+              <a:t>6</a:t>
+            </a:fld>
+            <a:endParaRPr lang="en-US" dirty="0"/>
+          </a:p>
+        </p:txBody>
+      </p:sp>
+      <p:sp>
+        <p:nvSpPr>
+          <p:cNvPr id="3" name="제목 1">
+            <a:extLst>
+              <a:ext uri="{FF2B5EF4-FFF2-40B4-BE49-F238E27FC236}">
+                <a16:creationId xmlns:a16="http://schemas.microsoft.com/office/drawing/2014/main" id="{4CFAE41E-0C23-D25B-F5A3-DA67C87B820D}"/>
+              </a:ext>
+            </a:extLst>
+          </p:cNvPr>
+          <p:cNvSpPr txBox="1">
+            <a:spLocks/>
+          </p:cNvSpPr>
+          <p:nvPr/>
+        </p:nvSpPr>
+        <p:spPr>
+          <a:xfrm>
+            <a:off x="475645" y="481983"/>
+            <a:ext cx="10353762" cy="766439"/>
+          </a:xfrm>
+          <a:prstGeom prst="rect">
+            <a:avLst/>
+          </a:prstGeom>
+        </p:spPr>
+        <p:txBody>
+          <a:bodyPr vert="horz" lIns="91440" tIns="45720" rIns="91440" bIns="45720" rtlCol="0" anchor="ctr">
+            <a:normAutofit/>
+          </a:bodyPr>
+          <a:lstStyle>
+            <a:lvl1pPr algn="ctr" defTabSz="914400" rtl="0" eaLnBrk="1" latinLnBrk="1" hangingPunct="1">
+              <a:lnSpc>
+                <a:spcPct val="90000"/>
+              </a:lnSpc>
+              <a:spcBef>
+                <a:spcPct val="0"/>
+              </a:spcBef>
+              <a:buNone/>
+              <a:defRPr sz="3200" kern="1200" cap="all" baseline="0">
+                <a:solidFill>
+                  <a:schemeClr val="tx1"/>
+                </a:solidFill>
+                <a:effectLst/>
+                <a:latin typeface="Batang" panose="02030600000101010101" pitchFamily="18" charset="-127"/>
+                <a:ea typeface="Batang" panose="02030600000101010101" pitchFamily="18" charset="-127"/>
+                <a:cs typeface="+mj-cs"/>
+              </a:defRPr>
+            </a:lvl1pPr>
+          </a:lstStyle>
+          <a:p>
+            <a:pPr algn="l"/>
+            <a:r>
+              <a:rPr lang="en-US" altLang="ko-KR" sz="2800" cap="none" dirty="0" err="1">
+                <a:solidFill>
+                  <a:schemeClr val="bg2">
+                    <a:lumMod val="25000"/>
+                  </a:schemeClr>
+                </a:solidFill>
+                <a:latin typeface="맑은 고딕" panose="020B0503020000020004" pitchFamily="50" charset="-127"/>
+                <a:ea typeface="맑은 고딕" panose="020B0503020000020004" pitchFamily="50" charset="-127"/>
+                <a:cs typeface="Segoe UI Light" panose="020B0502040204020203" pitchFamily="34" charset="0"/>
+              </a:rPr>
+              <a:t>PyTorch</a:t>
+            </a:r>
+            <a:endParaRPr lang="ko-KR" altLang="en-US" sz="2800" cap="none" dirty="0">
+              <a:solidFill>
+                <a:schemeClr val="bg2">
+                  <a:lumMod val="25000"/>
+                </a:schemeClr>
+              </a:solidFill>
+              <a:latin typeface="맑은 고딕" panose="020B0503020000020004" pitchFamily="50" charset="-127"/>
+              <a:ea typeface="맑은 고딕" panose="020B0503020000020004" pitchFamily="50" charset="-127"/>
+              <a:cs typeface="Segoe UI Light" panose="020B0502040204020203" pitchFamily="34" charset="0"/>
+            </a:endParaRPr>
+          </a:p>
+        </p:txBody>
+      </p:sp>
+      <p:pic>
+        <p:nvPicPr>
+          <p:cNvPr id="5" name="그림 4">
+            <a:extLst>
+              <a:ext uri="{FF2B5EF4-FFF2-40B4-BE49-F238E27FC236}">
+                <a16:creationId xmlns:a16="http://schemas.microsoft.com/office/drawing/2014/main" id="{C6D3A29D-2578-CF1A-0E4C-BF36B1ADF3E8}"/>
+              </a:ext>
+            </a:extLst>
+          </p:cNvPr>
+          <p:cNvPicPr>
+            <a:picLocks noChangeAspect="1"/>
+          </p:cNvPicPr>
+          <p:nvPr/>
+        </p:nvPicPr>
+        <p:blipFill>
+          <a:blip r:embed="rId2"/>
+          <a:stretch>
+            <a:fillRect/>
+          </a:stretch>
+        </p:blipFill>
+        <p:spPr>
+          <a:xfrm>
+            <a:off x="2506805" y="2219225"/>
+            <a:ext cx="5822999" cy="3314800"/>
+          </a:xfrm>
+          <a:prstGeom prst="rect">
+            <a:avLst/>
+          </a:prstGeom>
+        </p:spPr>
+      </p:pic>
+    </p:spTree>
+    <p:extLst>
+      <p:ext uri="{BB962C8B-B14F-4D97-AF65-F5344CB8AC3E}">
+        <p14:creationId xmlns:p14="http://schemas.microsoft.com/office/powerpoint/2010/main" val="3027768111"/>
+      </p:ext>
+    </p:extLst>
+  </p:cSld>
+  <p:clrMapOvr>
+    <a:masterClrMapping/>
+  </p:clrMapOvr>
+</p:sld>
+</file>
+
+<file path=ppt/slides/slide7.xml><?xml version="1.0" encoding="utf-8"?>
+<p:sld xmlns:a="http://schemas.openxmlformats.org/drawingml/2006/main" xmlns:r="http://schemas.openxmlformats.org/officeDocument/2006/relationships" xmlns:p="http://schemas.openxmlformats.org/presentationml/2006/main">
+  <p:cSld>
+    <p:spTree>
+      <p:nvGrpSpPr>
+        <p:cNvPr id="1" name="">
+          <a:extLst>
+            <a:ext uri="{FF2B5EF4-FFF2-40B4-BE49-F238E27FC236}">
               <a16:creationId xmlns:a16="http://schemas.microsoft.com/office/drawing/2014/main" id="{F5B0EB1D-5085-AFC4-6F4A-DB4276604C7C}"/>
             </a:ext>
           </a:extLst>
@@ -3700,7 +5660,7 @@
             <a:fld id="{D57F1E4F-1CFF-5643-939E-217C01CDF565}" type="slidenum">
               <a:rPr lang="en-US" smtClean="0"/>
               <a:pPr/>
-              <a:t>4</a:t>
+              <a:t>7</a:t>
             </a:fld>
             <a:endParaRPr lang="en-US" dirty="0"/>
           </a:p>
@@ -3824,7 +5784,7 @@
 </p:sld>
 </file>
 
-<file path=ppt/slides/slide5.xml><?xml version="1.0" encoding="utf-8"?>
+<file path=ppt/slides/slide8.xml><?xml version="1.0" encoding="utf-8"?>
 <p:sld xmlns:a="http://schemas.openxmlformats.org/drawingml/2006/main" xmlns:r="http://schemas.openxmlformats.org/officeDocument/2006/relationships" xmlns:p="http://schemas.openxmlformats.org/presentationml/2006/main">
   <p:cSld>
     <p:spTree>
@@ -3876,7 +5836,7 @@
             <a:fld id="{D57F1E4F-1CFF-5643-939E-217C01CDF565}" type="slidenum">
               <a:rPr lang="en-US" smtClean="0"/>
               <a:pPr/>
-              <a:t>5</a:t>
+              <a:t>8</a:t>
             </a:fld>
             <a:endParaRPr lang="en-US" dirty="0"/>
           </a:p>
@@ -4000,7 +5960,7 @@
 </p:sld>
 </file>
 
-<file path=ppt/slides/slide6.xml><?xml version="1.0" encoding="utf-8"?>
+<file path=ppt/slides/slide9.xml><?xml version="1.0" encoding="utf-8"?>
 <p:sld xmlns:a="http://schemas.openxmlformats.org/drawingml/2006/main" xmlns:r="http://schemas.openxmlformats.org/officeDocument/2006/relationships" xmlns:p="http://schemas.openxmlformats.org/presentationml/2006/main">
   <p:cSld>
     <p:spTree>
@@ -4052,7 +6012,7 @@
             <a:fld id="{D57F1E4F-1CFF-5643-939E-217C01CDF565}" type="slidenum">
               <a:rPr lang="en-US" smtClean="0"/>
               <a:pPr/>
-              <a:t>6</a:t>
+              <a:t>9</a:t>
             </a:fld>
             <a:endParaRPr lang="en-US" dirty="0"/>
           </a:p>
